--- a/Success Plan - Brightline Logistics.pptx
+++ b/Success Plan - Brightline Logistics.pptx
@@ -2878,7 +2878,7 @@
                 <a:ea typeface="Calibri" pitchFamily="34" charset="-122"/>
                 <a:cs typeface="Calibri" pitchFamily="34" charset="-120"/>
               </a:rPr>
-              <a:t>ADOPTION</a:t>
+              <a:t>TIME SAVED</a:t>
             </a:r>
             <a:endParaRPr lang="en-US" sz="1050" dirty="0"/>
           </a:p>
@@ -2917,7 +2917,7 @@
                 <a:ea typeface="Cambria" pitchFamily="34" charset="-122"/>
                 <a:cs typeface="Cambria" pitchFamily="34" charset="-120"/>
               </a:rPr>
-              <a:t>58 / 90</a:t>
+              <a:t>12 / 50</a:t>
             </a:r>
             <a:endParaRPr lang="en-US" sz="2600" dirty="0"/>
           </a:p>
@@ -2956,7 +2956,7 @@
                 <a:ea typeface="Calibri" pitchFamily="34" charset="-122"/>
                 <a:cs typeface="Calibri" pitchFamily="34" charset="-120"/>
               </a:rPr>
-              <a:t>Exception alerts actioned within SLA (%)</a:t>
+              <a:t>Exception-handling time reduction (% reduction)</a:t>
             </a:r>
             <a:endParaRPr lang="en-US" sz="1050" dirty="0"/>
           </a:p>
@@ -3022,7 +3022,7 @@
                 <a:ea typeface="Calibri" pitchFamily="34" charset="-122"/>
                 <a:cs typeface="Calibri" pitchFamily="34" charset="-120"/>
               </a:rPr>
-              <a:t>ONBOARDING</a:t>
+              <a:t>COST REDUCTION</a:t>
             </a:r>
             <a:endParaRPr lang="en-US" sz="1050" dirty="0"/>
           </a:p>
@@ -3030,7 +3030,85 @@
       </p:sp>
       <p:sp>
         <p:nvSpPr>
-          <p:cNvPr id="19" name="Shape 17"/>
+          <p:cNvPr id="19" name="Text 17"/>
+          <p:cNvSpPr txBox="1"/>
+          <p:nvPr/>
+        </p:nvSpPr>
+        <p:spPr>
+          <a:xfrm>
+            <a:off x="4572000" y="4572000"/>
+            <a:ext cx="3108960" cy="548640"/>
+          </a:xfrm>
+          <a:prstGeom prst="rect">
+            <a:avLst/>
+          </a:prstGeom>
+          <a:noFill/>
+          <a:ln/>
+        </p:spPr>
+        <p:txBody>
+          <a:bodyPr wrap="square" lIns="0" tIns="0" rIns="0" bIns="0" rtlCol="0" anchor="ctr"/>
+          <a:lstStyle/>
+          <a:p>
+            <a:pPr indent="0" marL="0">
+              <a:buNone/>
+            </a:pPr>
+            <a:r>
+              <a:rPr lang="en-US" sz="2600" b="1" dirty="0">
+                <a:solidFill>
+                  <a:srgbClr val="1E2761"/>
+                </a:solidFill>
+                <a:latin typeface="Cambria" pitchFamily="34" charset="0"/>
+                <a:ea typeface="Cambria" pitchFamily="34" charset="-122"/>
+                <a:cs typeface="Cambria" pitchFamily="34" charset="-120"/>
+              </a:rPr>
+              <a:t>$38,000 / $120,000</a:t>
+            </a:r>
+            <a:endParaRPr lang="en-US" sz="2600" dirty="0"/>
+          </a:p>
+        </p:txBody>
+      </p:sp>
+      <p:sp>
+        <p:nvSpPr>
+          <p:cNvPr id="20" name="Text 18"/>
+          <p:cNvSpPr txBox="1"/>
+          <p:nvPr/>
+        </p:nvSpPr>
+        <p:spPr>
+          <a:xfrm>
+            <a:off x="4572000" y="5138928"/>
+            <a:ext cx="3200400" cy="594360"/>
+          </a:xfrm>
+          <a:prstGeom prst="rect">
+            <a:avLst/>
+          </a:prstGeom>
+          <a:noFill/>
+          <a:ln/>
+        </p:spPr>
+        <p:txBody>
+          <a:bodyPr wrap="square" lIns="0" tIns="0" rIns="0" bIns="0" rtlCol="0" anchor="ctr"/>
+          <a:lstStyle/>
+          <a:p>
+            <a:pPr indent="0" marL="0">
+              <a:buNone/>
+            </a:pPr>
+            <a:r>
+              <a:rPr lang="en-US" sz="1050" dirty="0">
+                <a:solidFill>
+                  <a:srgbClr val="6B7280"/>
+                </a:solidFill>
+                <a:latin typeface="Calibri" pitchFamily="34" charset="0"/>
+                <a:ea typeface="Calibri" pitchFamily="34" charset="-122"/>
+                <a:cs typeface="Calibri" pitchFamily="34" charset="-120"/>
+              </a:rPr>
+              <a:t>Freight exception cost avoided (per year)</a:t>
+            </a:r>
+            <a:endParaRPr lang="en-US" sz="1050" dirty="0"/>
+          </a:p>
+        </p:txBody>
+      </p:sp>
+      <p:sp>
+        <p:nvSpPr>
+          <p:cNvPr id="21" name="Shape 19"/>
           <p:cNvSpPr/>
           <p:nvPr/>
         </p:nvSpPr>
@@ -3057,7 +3135,7 @@
       </p:sp>
       <p:sp>
         <p:nvSpPr>
-          <p:cNvPr id="20" name="Text 18"/>
+          <p:cNvPr id="22" name="Text 20"/>
           <p:cNvSpPr txBox="1"/>
           <p:nvPr/>
         </p:nvSpPr>
@@ -3088,7 +3166,7 @@
                 <a:ea typeface="Calibri" pitchFamily="34" charset="-122"/>
                 <a:cs typeface="Calibri" pitchFamily="34" charset="-120"/>
               </a:rPr>
-              <a:t>BUSINESS IMPACT</a:t>
+              <a:t>PROCESS SIMPLIFIED</a:t>
             </a:r>
             <a:endParaRPr lang="en-US" sz="1050" dirty="0"/>
           </a:p>
@@ -3096,7 +3174,7 @@
       </p:sp>
       <p:sp>
         <p:nvSpPr>
-          <p:cNvPr id="21" name="Text 19"/>
+          <p:cNvPr id="23" name="Text 21"/>
           <p:cNvSpPr txBox="1"/>
           <p:nvPr/>
         </p:nvSpPr>
@@ -3127,7 +3205,7 @@
                 <a:ea typeface="Cambria" pitchFamily="34" charset="-122"/>
                 <a:cs typeface="Cambria" pitchFamily="34" charset="-120"/>
               </a:rPr>
-              <a:t>12 / 50</a:t>
+              <a:t>40 / 150</a:t>
             </a:r>
             <a:endParaRPr lang="en-US" sz="2600" dirty="0"/>
           </a:p>
@@ -3135,7 +3213,7 @@
       </p:sp>
       <p:sp>
         <p:nvSpPr>
-          <p:cNvPr id="22" name="Text 20"/>
+          <p:cNvPr id="24" name="Text 22"/>
           <p:cNvSpPr txBox="1"/>
           <p:nvPr/>
         </p:nvSpPr>
@@ -3166,7 +3244,7 @@
                 <a:ea typeface="Calibri" pitchFamily="34" charset="-122"/>
                 <a:cs typeface="Calibri" pitchFamily="34" charset="-120"/>
               </a:rPr>
-              <a:t>Exception-handling time reduction (% reduction)</a:t>
+              <a:t>Manual exception reviews eliminated (reviews/week)</a:t>
             </a:r>
             <a:endParaRPr lang="en-US" sz="1050" dirty="0"/>
           </a:p>
@@ -3174,7 +3252,7 @@
       </p:sp>
       <p:sp>
         <p:nvSpPr>
-          <p:cNvPr id="23" name="Text 21"/>
+          <p:cNvPr id="25" name="Text 23"/>
           <p:cNvSpPr txBox="1"/>
           <p:nvPr/>
         </p:nvSpPr>
@@ -3213,7 +3291,7 @@
       </p:sp>
       <p:sp>
         <p:nvSpPr>
-          <p:cNvPr id="24" name="Text 22"/>
+          <p:cNvPr id="26" name="Text 24"/>
           <p:cNvSpPr txBox="1"/>
           <p:nvPr/>
         </p:nvSpPr>
@@ -3315,7 +3393,7 @@
                 <a:ea typeface="Calibri" pitchFamily="34" charset="-122"/>
                 <a:cs typeface="Calibri" pitchFamily="34" charset="-120"/>
               </a:rPr>
-              <a:t>TSIA COMPONENT 1</a:t>
+              <a:t>SECTION 1</a:t>
             </a:r>
             <a:endParaRPr lang="en-US" sz="1200" dirty="0"/>
           </a:p>
@@ -4122,7 +4200,7 @@
                 <a:ea typeface="Calibri" pitchFamily="34" charset="-122"/>
                 <a:cs typeface="Calibri" pitchFamily="34" charset="-120"/>
               </a:rPr>
-              <a:t>TSIA COMPONENT 2</a:t>
+              <a:t>SECTION 2</a:t>
             </a:r>
             <a:endParaRPr lang="en-US" sz="1200" dirty="0"/>
           </a:p>
@@ -4585,7 +4663,7 @@
                 <a:ea typeface="Calibri" pitchFamily="34" charset="-122"/>
                 <a:cs typeface="Calibri" pitchFamily="34" charset="-120"/>
               </a:rPr>
-              <a:t>TSIA COMPONENT 3</a:t>
+              <a:t>SECTION 3</a:t>
             </a:r>
             <a:endParaRPr lang="en-US" sz="1200" dirty="0"/>
           </a:p>
@@ -5608,7 +5686,7 @@
                 <a:ea typeface="Calibri" pitchFamily="34" charset="-122"/>
                 <a:cs typeface="Calibri" pitchFamily="34" charset="-120"/>
               </a:rPr>
-              <a:t>TSIA COMPONENT 4</a:t>
+              <a:t>SECTION 4</a:t>
             </a:r>
             <a:endParaRPr lang="en-US" sz="1200" dirty="0"/>
           </a:p>
@@ -5662,7 +5740,7 @@
         <p:spPr>
           <a:xfrm>
             <a:off x="548640" y="1508760"/>
-            <a:ext cx="3657600" cy="2743200"/>
+            <a:ext cx="3398520" cy="2743200"/>
           </a:xfrm>
           <a:prstGeom prst="roundRect">
             <a:avLst>
@@ -5689,7 +5767,7 @@
         <p:spPr>
           <a:xfrm>
             <a:off x="822960" y="1737360"/>
-            <a:ext cx="3108960" cy="274320"/>
+            <a:ext cx="2849880" cy="274320"/>
           </a:xfrm>
           <a:prstGeom prst="rect">
             <a:avLst/>
@@ -5713,7 +5791,7 @@
                 <a:ea typeface="Calibri" pitchFamily="34" charset="-122"/>
                 <a:cs typeface="Calibri" pitchFamily="34" charset="-120"/>
               </a:rPr>
-              <a:t>ADOPTION</a:t>
+              <a:t>TIME SAVED</a:t>
             </a:r>
             <a:endParaRPr lang="en-US" sz="1100" dirty="0"/>
           </a:p>
@@ -5728,7 +5806,7 @@
         <p:spPr>
           <a:xfrm>
             <a:off x="822960" y="2011680"/>
-            <a:ext cx="3108960" cy="320040"/>
+            <a:ext cx="2849880" cy="320040"/>
           </a:xfrm>
           <a:prstGeom prst="rect">
             <a:avLst/>
@@ -5752,7 +5830,7 @@
                 <a:ea typeface="Calibri" pitchFamily="34" charset="-122"/>
                 <a:cs typeface="Calibri" pitchFamily="34" charset="-120"/>
               </a:rPr>
-              <a:t>Active usage of the platform</a:t>
+              <a:t>Hours or cycle time given back to the customer</a:t>
             </a:r>
             <a:endParaRPr lang="en-US" sz="1000" dirty="0"/>
           </a:p>
@@ -5767,7 +5845,7 @@
         <p:spPr>
           <a:xfrm>
             <a:off x="822960" y="2286000"/>
-            <a:ext cx="3108960" cy="365760"/>
+            <a:ext cx="2849880" cy="365760"/>
           </a:xfrm>
           <a:prstGeom prst="rect">
             <a:avLst/>
@@ -5791,7 +5869,7 @@
                 <a:ea typeface="Calibri" pitchFamily="34" charset="-122"/>
                 <a:cs typeface="Calibri" pitchFamily="34" charset="-120"/>
               </a:rPr>
-              <a:t>Exception alerts actioned within SLA</a:t>
+              <a:t>Exception-handling time reduction</a:t>
             </a:r>
             <a:endParaRPr lang="en-US" sz="1200" dirty="0"/>
           </a:p>
@@ -5806,7 +5884,7 @@
         <p:spPr>
           <a:xfrm>
             <a:off x="822960" y="2606040"/>
-            <a:ext cx="3108960" cy="594360"/>
+            <a:ext cx="2849880" cy="594360"/>
           </a:xfrm>
           <a:prstGeom prst="rect">
             <a:avLst/>
@@ -5830,7 +5908,7 @@
                 <a:ea typeface="Cambria" pitchFamily="34" charset="-122"/>
                 <a:cs typeface="Cambria" pitchFamily="34" charset="-120"/>
               </a:rPr>
-              <a:t>58</a:t>
+              <a:t>12</a:t>
             </a:r>
             <a:endParaRPr lang="en-US" sz="3400" dirty="0"/>
           </a:p>
@@ -5845,7 +5923,7 @@
         <p:spPr>
           <a:xfrm>
             <a:off x="822960" y="3182112"/>
-            <a:ext cx="3108960" cy="274320"/>
+            <a:ext cx="2849880" cy="274320"/>
           </a:xfrm>
           <a:prstGeom prst="rect">
             <a:avLst/>
@@ -5869,7 +5947,7 @@
                 <a:ea typeface="Calibri" pitchFamily="34" charset="-122"/>
                 <a:cs typeface="Calibri" pitchFamily="34" charset="-120"/>
               </a:rPr>
-              <a:t>of 90 % target</a:t>
+              <a:t>of 50 % reduction target</a:t>
             </a:r>
             <a:endParaRPr lang="en-US" sz="1050" dirty="0"/>
           </a:p>
@@ -5884,7 +5962,7 @@
         <p:spPr>
           <a:xfrm>
             <a:off x="822960" y="3547872"/>
-            <a:ext cx="3108960" cy="201168"/>
+            <a:ext cx="2849880" cy="201168"/>
           </a:xfrm>
           <a:prstGeom prst="roundRect">
             <a:avLst>
@@ -5906,7 +5984,7 @@
         <p:spPr>
           <a:xfrm>
             <a:off x="822960" y="3547872"/>
-            <a:ext cx="1989734" cy="201168"/>
+            <a:ext cx="683971" cy="201168"/>
           </a:xfrm>
           <a:prstGeom prst="roundRect">
             <a:avLst>
@@ -5914,7 +5992,7 @@
             </a:avLst>
           </a:prstGeom>
           <a:solidFill>
-            <a:srgbClr val="B7791F"/>
+            <a:srgbClr val="B4312F"/>
           </a:solidFill>
           <a:ln/>
         </p:spPr>
@@ -5928,7 +6006,7 @@
         <p:spPr>
           <a:xfrm>
             <a:off x="822960" y="3794760"/>
-            <a:ext cx="3108960" cy="274320"/>
+            <a:ext cx="2849880" cy="274320"/>
           </a:xfrm>
           <a:prstGeom prst="rect">
             <a:avLst/>
@@ -5952,7 +6030,7 @@
                 <a:ea typeface="Calibri" pitchFamily="34" charset="-122"/>
                 <a:cs typeface="Calibri" pitchFamily="34" charset="-120"/>
               </a:rPr>
-              <a:t>64% of target</a:t>
+              <a:t>24% of target</a:t>
             </a:r>
             <a:endParaRPr lang="en-US" sz="950" dirty="0"/>
           </a:p>
@@ -5966,8 +6044,8 @@
         </p:nvSpPr>
         <p:spPr>
           <a:xfrm>
-            <a:off x="4434840" y="1508760"/>
-            <a:ext cx="3657600" cy="2743200"/>
+            <a:off x="4175760" y="1508760"/>
+            <a:ext cx="3398520" cy="2743200"/>
           </a:xfrm>
           <a:prstGeom prst="roundRect">
             <a:avLst>
@@ -5993,8 +6071,8 @@
         </p:nvSpPr>
         <p:spPr>
           <a:xfrm>
-            <a:off x="4709160" y="1737360"/>
-            <a:ext cx="3108960" cy="274320"/>
+            <a:off x="4450080" y="1737360"/>
+            <a:ext cx="2849880" cy="274320"/>
           </a:xfrm>
           <a:prstGeom prst="rect">
             <a:avLst/>
@@ -6018,7 +6096,7 @@
                 <a:ea typeface="Calibri" pitchFamily="34" charset="-122"/>
                 <a:cs typeface="Calibri" pitchFamily="34" charset="-120"/>
               </a:rPr>
-              <a:t>ONBOARDING</a:t>
+              <a:t>COST REDUCTION</a:t>
             </a:r>
             <a:endParaRPr lang="en-US" sz="1100" dirty="0"/>
           </a:p>
@@ -6032,8 +6110,8 @@
         </p:nvSpPr>
         <p:spPr>
           <a:xfrm>
-            <a:off x="4709160" y="2011680"/>
-            <a:ext cx="3108960" cy="320040"/>
+            <a:off x="4450080" y="2011680"/>
+            <a:ext cx="2849880" cy="320040"/>
           </a:xfrm>
           <a:prstGeom prst="rect">
             <a:avLst/>
@@ -6057,7 +6135,7 @@
                 <a:ea typeface="Calibri" pitchFamily="34" charset="-122"/>
                 <a:cs typeface="Calibri" pitchFamily="34" charset="-120"/>
               </a:rPr>
-              <a:t>Speed to first value</a:t>
+              <a:t>Spend avoided or reduced for the customer</a:t>
             </a:r>
             <a:endParaRPr lang="en-US" sz="1000" dirty="0"/>
           </a:p>
@@ -6065,14 +6143,214 @@
       </p:sp>
       <p:sp>
         <p:nvSpPr>
-          <p:cNvPr id="16" name="Shape 14"/>
+          <p:cNvPr id="16" name="Text 14"/>
+          <p:cNvSpPr txBox="1"/>
+          <p:nvPr/>
+        </p:nvSpPr>
+        <p:spPr>
+          <a:xfrm>
+            <a:off x="4450080" y="2286000"/>
+            <a:ext cx="2849880" cy="365760"/>
+          </a:xfrm>
+          <a:prstGeom prst="rect">
+            <a:avLst/>
+          </a:prstGeom>
+          <a:noFill/>
+          <a:ln/>
+        </p:spPr>
+        <p:txBody>
+          <a:bodyPr wrap="square" lIns="0" tIns="0" rIns="0" bIns="0" rtlCol="0" anchor="ctr"/>
+          <a:lstStyle/>
+          <a:p>
+            <a:pPr indent="0" marL="0">
+              <a:buNone/>
+            </a:pPr>
+            <a:r>
+              <a:rPr lang="en-US" sz="1200" b="1" dirty="0">
+                <a:solidFill>
+                  <a:srgbClr val="222222"/>
+                </a:solidFill>
+                <a:latin typeface="Calibri" pitchFamily="34" charset="0"/>
+                <a:ea typeface="Calibri" pitchFamily="34" charset="-122"/>
+                <a:cs typeface="Calibri" pitchFamily="34" charset="-120"/>
+              </a:rPr>
+              <a:t>Freight exception cost avoided</a:t>
+            </a:r>
+            <a:endParaRPr lang="en-US" sz="1200" dirty="0"/>
+          </a:p>
+        </p:txBody>
+      </p:sp>
+      <p:sp>
+        <p:nvSpPr>
+          <p:cNvPr id="17" name="Text 15"/>
+          <p:cNvSpPr txBox="1"/>
+          <p:nvPr/>
+        </p:nvSpPr>
+        <p:spPr>
+          <a:xfrm>
+            <a:off x="4450080" y="2606040"/>
+            <a:ext cx="2849880" cy="594360"/>
+          </a:xfrm>
+          <a:prstGeom prst="rect">
+            <a:avLst/>
+          </a:prstGeom>
+          <a:noFill/>
+          <a:ln/>
+        </p:spPr>
+        <p:txBody>
+          <a:bodyPr wrap="square" lIns="0" tIns="0" rIns="0" bIns="0" rtlCol="0" anchor="ctr"/>
+          <a:lstStyle/>
+          <a:p>
+            <a:pPr indent="0" marL="0">
+              <a:buNone/>
+            </a:pPr>
+            <a:r>
+              <a:rPr lang="en-US" sz="3400" b="1" dirty="0">
+                <a:solidFill>
+                  <a:srgbClr val="1E2761"/>
+                </a:solidFill>
+                <a:latin typeface="Cambria" pitchFamily="34" charset="0"/>
+                <a:ea typeface="Cambria" pitchFamily="34" charset="-122"/>
+                <a:cs typeface="Cambria" pitchFamily="34" charset="-120"/>
+              </a:rPr>
+              <a:t>$38,000</a:t>
+            </a:r>
+            <a:endParaRPr lang="en-US" sz="3400" dirty="0"/>
+          </a:p>
+        </p:txBody>
+      </p:sp>
+      <p:sp>
+        <p:nvSpPr>
+          <p:cNvPr id="18" name="Text 16"/>
+          <p:cNvSpPr txBox="1"/>
+          <p:nvPr/>
+        </p:nvSpPr>
+        <p:spPr>
+          <a:xfrm>
+            <a:off x="4450080" y="3182112"/>
+            <a:ext cx="2849880" cy="274320"/>
+          </a:xfrm>
+          <a:prstGeom prst="rect">
+            <a:avLst/>
+          </a:prstGeom>
+          <a:noFill/>
+          <a:ln/>
+        </p:spPr>
+        <p:txBody>
+          <a:bodyPr wrap="square" lIns="0" tIns="0" rIns="0" bIns="0" rtlCol="0" anchor="ctr"/>
+          <a:lstStyle/>
+          <a:p>
+            <a:pPr indent="0" marL="0">
+              <a:buNone/>
+            </a:pPr>
+            <a:r>
+              <a:rPr lang="en-US" sz="1050" dirty="0">
+                <a:solidFill>
+                  <a:srgbClr val="6B7280"/>
+                </a:solidFill>
+                <a:latin typeface="Calibri" pitchFamily="34" charset="0"/>
+                <a:ea typeface="Calibri" pitchFamily="34" charset="-122"/>
+                <a:cs typeface="Calibri" pitchFamily="34" charset="-120"/>
+              </a:rPr>
+              <a:t>of $120,000 per year target</a:t>
+            </a:r>
+            <a:endParaRPr lang="en-US" sz="1050" dirty="0"/>
+          </a:p>
+        </p:txBody>
+      </p:sp>
+      <p:sp>
+        <p:nvSpPr>
+          <p:cNvPr id="19" name="Shape 17"/>
           <p:cNvSpPr/>
           <p:nvPr/>
         </p:nvSpPr>
         <p:spPr>
           <a:xfrm>
-            <a:off x="8321040" y="1508760"/>
-            <a:ext cx="3657600" cy="2743200"/>
+            <a:off x="4450080" y="3547872"/>
+            <a:ext cx="2849880" cy="201168"/>
+          </a:xfrm>
+          <a:prstGeom prst="roundRect">
+            <a:avLst>
+              <a:gd name="adj" fmla="val 13636"/>
+            </a:avLst>
+          </a:prstGeom>
+          <a:solidFill>
+            <a:srgbClr val="E2E6F0"/>
+          </a:solidFill>
+          <a:ln/>
+        </p:spPr>
+      </p:sp>
+      <p:sp>
+        <p:nvSpPr>
+          <p:cNvPr id="20" name="Shape 18"/>
+          <p:cNvSpPr/>
+          <p:nvPr/>
+        </p:nvSpPr>
+        <p:spPr>
+          <a:xfrm>
+            <a:off x="4450080" y="3547872"/>
+            <a:ext cx="911962" cy="201168"/>
+          </a:xfrm>
+          <a:prstGeom prst="roundRect">
+            <a:avLst>
+              <a:gd name="adj" fmla="val 13636"/>
+            </a:avLst>
+          </a:prstGeom>
+          <a:solidFill>
+            <a:srgbClr val="B4312F"/>
+          </a:solidFill>
+          <a:ln/>
+        </p:spPr>
+      </p:sp>
+      <p:sp>
+        <p:nvSpPr>
+          <p:cNvPr id="21" name="Text 19"/>
+          <p:cNvSpPr txBox="1"/>
+          <p:nvPr/>
+        </p:nvSpPr>
+        <p:spPr>
+          <a:xfrm>
+            <a:off x="4450080" y="3794760"/>
+            <a:ext cx="2849880" cy="274320"/>
+          </a:xfrm>
+          <a:prstGeom prst="rect">
+            <a:avLst/>
+          </a:prstGeom>
+          <a:noFill/>
+          <a:ln/>
+        </p:spPr>
+        <p:txBody>
+          <a:bodyPr wrap="square" lIns="0" tIns="0" rIns="0" bIns="0" rtlCol="0" anchor="ctr"/>
+          <a:lstStyle/>
+          <a:p>
+            <a:pPr indent="0" marL="0">
+              <a:buNone/>
+            </a:pPr>
+            <a:r>
+              <a:rPr lang="en-US" sz="950" dirty="0">
+                <a:solidFill>
+                  <a:srgbClr val="6B7280"/>
+                </a:solidFill>
+                <a:latin typeface="Calibri" pitchFamily="34" charset="0"/>
+                <a:ea typeface="Calibri" pitchFamily="34" charset="-122"/>
+                <a:cs typeface="Calibri" pitchFamily="34" charset="-120"/>
+              </a:rPr>
+              <a:t>32% of target</a:t>
+            </a:r>
+            <a:endParaRPr lang="en-US" sz="950" dirty="0"/>
+          </a:p>
+        </p:txBody>
+      </p:sp>
+      <p:sp>
+        <p:nvSpPr>
+          <p:cNvPr id="22" name="Shape 20"/>
+          <p:cNvSpPr/>
+          <p:nvPr/>
+        </p:nvSpPr>
+        <p:spPr>
+          <a:xfrm>
+            <a:off x="7802880" y="1508760"/>
+            <a:ext cx="3398520" cy="2743200"/>
           </a:xfrm>
           <a:prstGeom prst="roundRect">
             <a:avLst>
@@ -6092,14 +6370,14 @@
       </p:sp>
       <p:sp>
         <p:nvSpPr>
-          <p:cNvPr id="17" name="Text 15"/>
-          <p:cNvSpPr txBox="1"/>
-          <p:nvPr/>
-        </p:nvSpPr>
-        <p:spPr>
-          <a:xfrm>
-            <a:off x="8595360" y="1737360"/>
-            <a:ext cx="3108960" cy="274320"/>
+          <p:cNvPr id="23" name="Text 21"/>
+          <p:cNvSpPr txBox="1"/>
+          <p:nvPr/>
+        </p:nvSpPr>
+        <p:spPr>
+          <a:xfrm>
+            <a:off x="8077200" y="1737360"/>
+            <a:ext cx="2849880" cy="274320"/>
           </a:xfrm>
           <a:prstGeom prst="rect">
             <a:avLst/>
@@ -6123,7 +6401,7 @@
                 <a:ea typeface="Calibri" pitchFamily="34" charset="-122"/>
                 <a:cs typeface="Calibri" pitchFamily="34" charset="-120"/>
               </a:rPr>
-              <a:t>BUSINESS IMPACT</a:t>
+              <a:t>PROCESS SIMPLIFIED</a:t>
             </a:r>
             <a:endParaRPr lang="en-US" sz="1100" dirty="0"/>
           </a:p>
@@ -6131,14 +6409,14 @@
       </p:sp>
       <p:sp>
         <p:nvSpPr>
-          <p:cNvPr id="18" name="Text 16"/>
-          <p:cNvSpPr txBox="1"/>
-          <p:nvPr/>
-        </p:nvSpPr>
-        <p:spPr>
-          <a:xfrm>
-            <a:off x="8595360" y="2011680"/>
-            <a:ext cx="3108960" cy="320040"/>
+          <p:cNvPr id="24" name="Text 22"/>
+          <p:cNvSpPr txBox="1"/>
+          <p:nvPr/>
+        </p:nvSpPr>
+        <p:spPr>
+          <a:xfrm>
+            <a:off x="8077200" y="2011680"/>
+            <a:ext cx="2849880" cy="320040"/>
           </a:xfrm>
           <a:prstGeom prst="rect">
             <a:avLst/>
@@ -6162,7 +6440,7 @@
                 <a:ea typeface="Calibri" pitchFamily="34" charset="-122"/>
                 <a:cs typeface="Calibri" pitchFamily="34" charset="-120"/>
               </a:rPr>
-              <a:t>Outcomes tied to ROI</a:t>
+              <a:t>Steps, tools, or manual work removed</a:t>
             </a:r>
             <a:endParaRPr lang="en-US" sz="1000" dirty="0"/>
           </a:p>
@@ -6170,14 +6448,14 @@
       </p:sp>
       <p:sp>
         <p:nvSpPr>
-          <p:cNvPr id="19" name="Text 17"/>
-          <p:cNvSpPr txBox="1"/>
-          <p:nvPr/>
-        </p:nvSpPr>
-        <p:spPr>
-          <a:xfrm>
-            <a:off x="8595360" y="2286000"/>
-            <a:ext cx="3108960" cy="365760"/>
+          <p:cNvPr id="25" name="Text 23"/>
+          <p:cNvSpPr txBox="1"/>
+          <p:nvPr/>
+        </p:nvSpPr>
+        <p:spPr>
+          <a:xfrm>
+            <a:off x="8077200" y="2286000"/>
+            <a:ext cx="2849880" cy="365760"/>
           </a:xfrm>
           <a:prstGeom prst="rect">
             <a:avLst/>
@@ -6201,7 +6479,7 @@
                 <a:ea typeface="Calibri" pitchFamily="34" charset="-122"/>
                 <a:cs typeface="Calibri" pitchFamily="34" charset="-120"/>
               </a:rPr>
-              <a:t>Exception-handling time reduction</a:t>
+              <a:t>Manual exception reviews eliminated</a:t>
             </a:r>
             <a:endParaRPr lang="en-US" sz="1200" dirty="0"/>
           </a:p>
@@ -6209,14 +6487,14 @@
       </p:sp>
       <p:sp>
         <p:nvSpPr>
-          <p:cNvPr id="20" name="Text 18"/>
-          <p:cNvSpPr txBox="1"/>
-          <p:nvPr/>
-        </p:nvSpPr>
-        <p:spPr>
-          <a:xfrm>
-            <a:off x="8595360" y="2606040"/>
-            <a:ext cx="3108960" cy="594360"/>
+          <p:cNvPr id="26" name="Text 24"/>
+          <p:cNvSpPr txBox="1"/>
+          <p:nvPr/>
+        </p:nvSpPr>
+        <p:spPr>
+          <a:xfrm>
+            <a:off x="8077200" y="2606040"/>
+            <a:ext cx="2849880" cy="594360"/>
           </a:xfrm>
           <a:prstGeom prst="rect">
             <a:avLst/>
@@ -6240,7 +6518,7 @@
                 <a:ea typeface="Cambria" pitchFamily="34" charset="-122"/>
                 <a:cs typeface="Cambria" pitchFamily="34" charset="-120"/>
               </a:rPr>
-              <a:t>12</a:t>
+              <a:t>40</a:t>
             </a:r>
             <a:endParaRPr lang="en-US" sz="3400" dirty="0"/>
           </a:p>
@@ -6248,14 +6526,14 @@
       </p:sp>
       <p:sp>
         <p:nvSpPr>
-          <p:cNvPr id="21" name="Text 19"/>
-          <p:cNvSpPr txBox="1"/>
-          <p:nvPr/>
-        </p:nvSpPr>
-        <p:spPr>
-          <a:xfrm>
-            <a:off x="8595360" y="3182112"/>
-            <a:ext cx="3108960" cy="274320"/>
+          <p:cNvPr id="27" name="Text 25"/>
+          <p:cNvSpPr txBox="1"/>
+          <p:nvPr/>
+        </p:nvSpPr>
+        <p:spPr>
+          <a:xfrm>
+            <a:off x="8077200" y="3182112"/>
+            <a:ext cx="2849880" cy="274320"/>
           </a:xfrm>
           <a:prstGeom prst="rect">
             <a:avLst/>
@@ -6279,7 +6557,7 @@
                 <a:ea typeface="Calibri" pitchFamily="34" charset="-122"/>
                 <a:cs typeface="Calibri" pitchFamily="34" charset="-120"/>
               </a:rPr>
-              <a:t>of 50 % reduction target</a:t>
+              <a:t>of 150 reviews/week target</a:t>
             </a:r>
             <a:endParaRPr lang="en-US" sz="1050" dirty="0"/>
           </a:p>
@@ -6287,14 +6565,14 @@
       </p:sp>
       <p:sp>
         <p:nvSpPr>
-          <p:cNvPr id="22" name="Shape 20"/>
+          <p:cNvPr id="28" name="Shape 26"/>
           <p:cNvSpPr/>
           <p:nvPr/>
         </p:nvSpPr>
         <p:spPr>
           <a:xfrm>
-            <a:off x="8595360" y="3547872"/>
-            <a:ext cx="3108960" cy="201168"/>
+            <a:off x="8077200" y="3547872"/>
+            <a:ext cx="2849880" cy="201168"/>
           </a:xfrm>
           <a:prstGeom prst="roundRect">
             <a:avLst>
@@ -6309,14 +6587,14 @@
       </p:sp>
       <p:sp>
         <p:nvSpPr>
-          <p:cNvPr id="23" name="Shape 21"/>
+          <p:cNvPr id="29" name="Shape 27"/>
           <p:cNvSpPr/>
           <p:nvPr/>
         </p:nvSpPr>
         <p:spPr>
           <a:xfrm>
-            <a:off x="8595360" y="3547872"/>
-            <a:ext cx="746150" cy="201168"/>
+            <a:off x="8077200" y="3547872"/>
+            <a:ext cx="769468" cy="201168"/>
           </a:xfrm>
           <a:prstGeom prst="roundRect">
             <a:avLst>
@@ -6331,14 +6609,14 @@
       </p:sp>
       <p:sp>
         <p:nvSpPr>
-          <p:cNvPr id="24" name="Text 22"/>
-          <p:cNvSpPr txBox="1"/>
-          <p:nvPr/>
-        </p:nvSpPr>
-        <p:spPr>
-          <a:xfrm>
-            <a:off x="8595360" y="3794760"/>
-            <a:ext cx="3108960" cy="274320"/>
+          <p:cNvPr id="30" name="Text 28"/>
+          <p:cNvSpPr txBox="1"/>
+          <p:nvPr/>
+        </p:nvSpPr>
+        <p:spPr>
+          <a:xfrm>
+            <a:off x="8077200" y="3794760"/>
+            <a:ext cx="2849880" cy="274320"/>
           </a:xfrm>
           <a:prstGeom prst="rect">
             <a:avLst/>
@@ -6362,7 +6640,7 @@
                 <a:ea typeface="Calibri" pitchFamily="34" charset="-122"/>
                 <a:cs typeface="Calibri" pitchFamily="34" charset="-120"/>
               </a:rPr>
-              <a:t>24% of target</a:t>
+              <a:t>27% of target</a:t>
             </a:r>
             <a:endParaRPr lang="en-US" sz="950" dirty="0"/>
           </a:p>
@@ -6370,7 +6648,7 @@
       </p:sp>
       <p:sp>
         <p:nvSpPr>
-          <p:cNvPr id="25" name="Text 23"/>
+          <p:cNvPr id="31" name="Text 29"/>
           <p:cNvSpPr txBox="1"/>
           <p:nvPr/>
         </p:nvSpPr>
@@ -6401,7 +6679,7 @@
                 <a:ea typeface="Calibri" pitchFamily="34" charset="-122"/>
                 <a:cs typeface="Calibri" pitchFamily="34" charset="-120"/>
               </a:rPr>
-              <a:t>Metric definitions follow TSIA guidance: adoption (active users / feature usage), onboarding (time-to-value, activation), and business impact (ROI, outcomes).</a:t>
+              <a:t>Metrics are tracked in the terms that matter to the customer: time saved, cost avoided, revenue enabled, or complexity removed from their operations.</a:t>
             </a:r>
             <a:endParaRPr lang="en-US" sz="1050" dirty="0"/>
           </a:p>
@@ -6409,7 +6687,7 @@
       </p:sp>
       <p:sp>
         <p:nvSpPr>
-          <p:cNvPr id="26" name="Text 24"/>
+          <p:cNvPr id="32" name="Text 30"/>
           <p:cNvSpPr txBox="1"/>
           <p:nvPr/>
         </p:nvSpPr>
@@ -6448,7 +6726,7 @@
       </p:sp>
       <p:sp>
         <p:nvSpPr>
-          <p:cNvPr id="27" name="Text 25"/>
+          <p:cNvPr id="33" name="Text 31"/>
           <p:cNvSpPr txBox="1"/>
           <p:nvPr/>
         </p:nvSpPr>
@@ -6550,7 +6828,7 @@
                 <a:ea typeface="Calibri" pitchFamily="34" charset="-122"/>
                 <a:cs typeface="Calibri" pitchFamily="34" charset="-120"/>
               </a:rPr>
-              <a:t>TSIA COMPONENT 5</a:t>
+              <a:t>SECTION 5</a:t>
             </a:r>
             <a:endParaRPr lang="en-US" sz="1200" dirty="0"/>
           </a:p>
@@ -7192,7 +7470,7 @@
                 <a:ea typeface="Calibri" pitchFamily="34" charset="-122"/>
                 <a:cs typeface="Calibri" pitchFamily="34" charset="-120"/>
               </a:rPr>
-              <a:t>TSIA COMPONENT 6</a:t>
+              <a:t>SECTION 6</a:t>
             </a:r>
             <a:endParaRPr lang="en-US" sz="1200" dirty="0"/>
           </a:p>
